--- a/deliverables/current/03-AegisBank-答辩材料.pptx
+++ b/deliverables/current/03-AegisBank-答辩材料.pptx
@@ -513,7 +513,7 @@
           <a:lstStyle/>
           <a:p>
             <a:r>
-              <a:t>建议讲解40秒（需人工实际计时）。可信银行 AI 智能体原型；所有金融数据与资金变动均为模拟。</a:t>
+              <a:t>建议讲解 40 秒。可信银行 AI 智能体原型；所有金融数据与资金变动均为模拟。</a:t>
             </a:r>
           </a:p>
         </p:txBody>
@@ -583,7 +583,7 @@
           <a:lstStyle/>
           <a:p>
             <a:r>
-              <a:t>建议讲解40秒（需人工实际计时）。自动化通过只覆盖已知用例，不能替代人工手机、键盘和读屏验收。</a:t>
+              <a:t>建议讲解 40 秒。自动化通过只覆盖已知用例；命令与边界见仓库《测试与复现》。</a:t>
             </a:r>
           </a:p>
         </p:txBody>
@@ -653,7 +653,7 @@
           <a:lstStyle/>
           <a:p>
             <a:r>
-              <a:t>建议讲解40秒（需人工实际计时）。明确哪些已自动验证、哪些仍需人工签署，不将候选包描述为已提交。</a:t>
+              <a:t>建议讲解 40 秒。明确演示边界，不把原型描述为生产银行系统。</a:t>
             </a:r>
           </a:p>
         </p:txBody>
@@ -723,7 +723,7 @@
           <a:lstStyle/>
           <a:p>
             <a:r>
-              <a:t>建议讲解40秒（需人工实际计时）。感谢评委；演示失败按部署说明恢复独立模拟库，UNKNOWN不自动重试。</a:t>
+              <a:t>建议讲解 40 秒。感谢评委；演示失败按部署说明恢复独立模拟库，UNKNOWN不自动重试。</a:t>
             </a:r>
           </a:p>
         </p:txBody>
@@ -793,7 +793,7 @@
           <a:lstStyle/>
           <a:p>
             <a:r>
-              <a:t>建议讲解40秒（需人工实际计时）。先演示三个核心场景，其余复用六场景自动检查证据。</a:t>
+              <a:t>建议讲解 40 秒。先演示三个核心场景，其余复用六场景自动检查证据。</a:t>
             </a:r>
           </a:p>
         </p:txBody>
@@ -863,7 +863,7 @@
           <a:lstStyle/>
           <a:p>
             <a:r>
-              <a:t>建议讲解40秒（需人工实际计时）。Planner 只生成候选；编译、授权、风险、执行与证据由确定性代码控制。</a:t>
+              <a:t>建议讲解 40 秒。Planner 只生成候选；编译、授权、风险、执行与证据由确定性代码控制。</a:t>
             </a:r>
           </a:p>
         </p:txBody>
@@ -933,7 +933,7 @@
           <a:lstStyle/>
           <a:p>
             <a:r>
-              <a:t>建议讲解40秒（需人工实际计时）。演示 OTP 和模拟生物识别仅证明流程，不能视为生产强认证。</a:t>
+              <a:t>建议讲解 40 秒。演示 OTP 和模拟生物识别仅证明流程，不能视为生产强认证。</a:t>
             </a:r>
           </a:p>
         </p:txBody>
@@ -1003,7 +1003,7 @@
           <a:lstStyle/>
           <a:p>
             <a:r>
-              <a:t>建议讲解40秒（需人工实际计时）。展示真实自动联调截图，并说明 CDP 自动交互不是独立人工验收。</a:t>
+              <a:t>建议讲解 40 秒。展示真实浏览器联调截图；自动检查不等同人工验收。</a:t>
             </a:r>
           </a:p>
         </p:txBody>
@@ -1073,7 +1073,7 @@
           <a:lstStyle/>
           <a:p>
             <a:r>
-              <a:t>建议讲解40秒（需人工实际计时）。同一会话仅有一个活动草稿；历史查询按演示用户隔离。</a:t>
+              <a:t>建议讲解 40 秒。同一会话仅有一个活动草稿；历史查询按演示用户隔离。</a:t>
             </a:r>
           </a:p>
         </p:txBody>
@@ -1143,7 +1143,7 @@
           <a:lstStyle/>
           <a:p>
             <a:r>
-              <a:t>建议讲解40秒（需人工实际计时）。预置有界 DAG 不是自由组合；不可逆操作不能承诺自动回滚。</a:t>
+              <a:t>建议讲解 40 秒。预置有界 DAG 不是自由组合；不可逆操作不能承诺自动回滚。</a:t>
             </a:r>
           </a:p>
         </p:txBody>
@@ -1213,7 +1213,7 @@
           <a:lstStyle/>
           <a:p>
             <a:r>
-              <a:t>建议讲解40秒（需人工实际计时）。沙箱是进程内逻辑约束；线程超时不等于 OS 强制终止。</a:t>
+              <a:t>建议讲解 40 秒。沙箱是进程内逻辑约束；线程超时不等于 OS 强制终止。</a:t>
             </a:r>
           </a:p>
         </p:txBody>
@@ -1283,7 +1283,7 @@
           <a:lstStyle/>
           <a:p>
             <a:r>
-              <a:t>建议讲解40秒（需人工实际计时）。具体本轮数字见收尾报告及JSON原始证据；95%不作为已取得成绩。</a:t>
+              <a:t>建议讲解 40 秒。评测口径与边界见仓库《测试与复现》；不宣称通用自然语言准确率。</a:t>
             </a:r>
           </a:p>
         </p:txBody>
@@ -4331,7 +4331,7 @@
                 </a:solidFill>
                 <a:latin typeface="Microsoft YaHei"/>
               </a:rPr>
-              <a:t>AEGISBANK  /  2026-10-31  /  模拟银行原型</a:t>
+              <a:t>AEGISBANK  /  银行 AI 智能体  /  模拟银行原型</a:t>
             </a:r>
           </a:p>
         </p:txBody>
@@ -4464,7 +4464,7 @@
                 </a:solidFill>
                 <a:latin typeface="Microsoft YaHei"/>
               </a:rPr>
-              <a:t>0xChainAegis  ·  候选材料，人工验收另列  |  01 / 12</a:t>
+              <a:t>0xChainAegis  ·  2026 深圳国际金融科技大赛  |  01 / 12</a:t>
             </a:r>
           </a:p>
         </p:txBody>
@@ -4529,7 +4529,7 @@
                 </a:solidFill>
                 <a:latin typeface="Microsoft YaHei"/>
               </a:rPr>
-              <a:t>AEGISBANK  /  2026-10-31  /  模拟银行原型</a:t>
+              <a:t>AEGISBANK  /  银行 AI 智能体  /  模拟银行原型</a:t>
             </a:r>
           </a:p>
         </p:txBody>
@@ -4607,7 +4607,7 @@
                 </a:solidFill>
                 <a:latin typeface="Microsoft YaHei"/>
               </a:rPr>
-              <a:t>后端 / 前端 / 组装器 / 六场景 / API契约 / lint / build</a:t>
+              <a:t>后端 671 项 pytest / 前端 144 项 Vitest 通过</a:t>
             </a:r>
           </a:p>
           <a:p>
@@ -4623,7 +4623,7 @@
                 </a:solidFill>
                 <a:latin typeface="Microsoft YaHei"/>
               </a:rPr>
-              <a:t>真实桌面与390px视口：Chromium → Vite → FastAPI → 新SQLite</a:t>
+              <a:t>组装器 28 项、六场景端到端 31/31 通过</a:t>
             </a:r>
           </a:p>
           <a:p>
@@ -4639,7 +4639,7 @@
                 </a:solidFill>
                 <a:latin typeface="Microsoft YaHei"/>
               </a:rPr>
-              <a:t>独立库种子重置、readiness与审计检查</a:t>
+              <a:t>工具 51 个、HTTP /api 路径 49 个</a:t>
             </a:r>
           </a:p>
           <a:p>
@@ -4655,7 +4655,7 @@
                 </a:solidFill>
                 <a:latin typeface="Microsoft YaHei"/>
               </a:rPr>
-              <a:t>干净源码归档复现，记录版本与SHA-256</a:t>
+              <a:t>真实桌面与 390px 视口：Chromium → Vite → FastAPI → 新 SQLite</a:t>
             </a:r>
           </a:p>
         </p:txBody>
@@ -4694,7 +4694,7 @@
                 </a:solidFill>
                 <a:latin typeface="Microsoft YaHei"/>
               </a:rPr>
-              <a:t>0xChainAegis  ·  候选材料，人工验收另列  |  10 / 12</a:t>
+              <a:t>0xChainAegis  ·  2026 深圳国际金融科技大赛  |  10 / 12</a:t>
             </a:r>
           </a:p>
         </p:txBody>
@@ -4759,7 +4759,7 @@
                 </a:solidFill>
                 <a:latin typeface="Microsoft YaHei"/>
               </a:rPr>
-              <a:t>AEGISBANK  /  2026-10-31  /  模拟银行原型</a:t>
+              <a:t>AEGISBANK  /  银行 AI 智能体  /  模拟银行原型</a:t>
             </a:r>
           </a:p>
         </p:txBody>
@@ -4798,7 +4798,7 @@
                 </a:solidFill>
                 <a:latin typeface="Microsoft YaHei"/>
               </a:rPr>
-              <a:t>当前边界与人工剩余</a:t>
+              <a:t>当前边界与适用范围</a:t>
             </a:r>
           </a:p>
         </p:txBody>
@@ -4837,7 +4837,7 @@
                 </a:solidFill>
                 <a:latin typeface="Microsoft YaHei"/>
               </a:rPr>
-              <a:t>全部数据模拟；无生产身份、真实MFA、真实IM、OS隔离</a:t>
+              <a:t>全部数据模拟；无生产身份、真实 MFA、真实 IM、OS 隔离</a:t>
             </a:r>
           </a:p>
           <a:p>
@@ -4853,7 +4853,7 @@
                 </a:solidFill>
                 <a:latin typeface="Microsoft YaHei"/>
               </a:rPr>
-              <a:t>U3个性化 / U5通用组合与条件规划未实施</a:t>
+              <a:t>不支持任意自然语言、通用跨轮记忆或自由条件组合</a:t>
             </a:r>
           </a:p>
           <a:p>
@@ -4869,7 +4869,7 @@
                 </a:solidFill>
                 <a:latin typeface="Microsoft YaHei"/>
               </a:rPr>
-              <a:t>人工：金标裁决、独立体验、录屏及正式提交</a:t>
+              <a:t>沙箱为进程内执行守卫，不是容器或 OS 资源隔离</a:t>
             </a:r>
           </a:p>
           <a:p>
@@ -4885,7 +4885,7 @@
                 </a:solidFill>
                 <a:latin typeface="Microsoft YaHei"/>
               </a:rPr>
-              <a:t>答辩≤10分钟、视频≤5分钟须实际计时</a:t>
+              <a:t>答辩 ≤10 分钟、视频 ≤5 分钟按大赛要求计时</a:t>
             </a:r>
           </a:p>
         </p:txBody>
@@ -4924,7 +4924,7 @@
                 </a:solidFill>
                 <a:latin typeface="Microsoft YaHei"/>
               </a:rPr>
-              <a:t>0xChainAegis  ·  候选材料，人工验收另列  |  11 / 12</a:t>
+              <a:t>0xChainAegis  ·  2026 深圳国际金融科技大赛  |  11 / 12</a:t>
             </a:r>
           </a:p>
         </p:txBody>
@@ -4989,7 +4989,7 @@
                 </a:solidFill>
                 <a:latin typeface="Microsoft YaHei"/>
               </a:rPr>
-              <a:t>AEGISBANK  /  2026-10-31  /  模拟银行原型</a:t>
+              <a:t>AEGISBANK  /  银行 AI 智能体  /  模拟银行原型</a:t>
             </a:r>
           </a:p>
         </p:txBody>
@@ -5154,7 +5154,7 @@
                 </a:solidFill>
                 <a:latin typeface="Microsoft YaHei"/>
               </a:rPr>
-              <a:t>0xChainAegis  ·  候选材料，人工验收另列  |  12 / 12</a:t>
+              <a:t>0xChainAegis  ·  2026 深圳国际金融科技大赛  |  12 / 12</a:t>
             </a:r>
           </a:p>
         </p:txBody>
@@ -5219,7 +5219,7 @@
                 </a:solidFill>
                 <a:latin typeface="Microsoft YaHei"/>
               </a:rPr>
-              <a:t>AEGISBANK  /  2026-10-31  /  模拟银行原型</a:t>
+              <a:t>AEGISBANK  /  银行 AI 智能体  /  模拟银行原型</a:t>
             </a:r>
           </a:p>
         </p:txBody>
@@ -5368,7 +5368,7 @@
                 </a:solidFill>
                 <a:latin typeface="Microsoft YaHei"/>
               </a:rPr>
-              <a:t>0xChainAegis  ·  候选材料，人工验收另列  |  02 / 12</a:t>
+              <a:t>0xChainAegis  ·  2026 深圳国际金融科技大赛  |  02 / 12</a:t>
             </a:r>
           </a:p>
         </p:txBody>
@@ -5433,7 +5433,7 @@
                 </a:solidFill>
                 <a:latin typeface="Microsoft YaHei"/>
               </a:rPr>
-              <a:t>AEGISBANK  /  2026-10-31  /  模拟银行原型</a:t>
+              <a:t>AEGISBANK  /  银行 AI 智能体  /  模拟银行原型</a:t>
             </a:r>
           </a:p>
         </p:txBody>
@@ -5535,7 +5535,7 @@
                 </a:solidFill>
                 <a:latin typeface="Microsoft YaHei"/>
               </a:rPr>
-              <a:t>0xChainAegis  ·  候选材料，人工验收另列  |  03 / 12</a:t>
+              <a:t>0xChainAegis  ·  2026 深圳国际金融科技大赛  |  03 / 12</a:t>
             </a:r>
           </a:p>
         </p:txBody>
@@ -5600,7 +5600,7 @@
                 </a:solidFill>
                 <a:latin typeface="Microsoft YaHei"/>
               </a:rPr>
-              <a:t>AEGISBANK  /  2026-10-31  /  模拟银行原型</a:t>
+              <a:t>AEGISBANK  /  银行 AI 智能体  /  模拟银行原型</a:t>
             </a:r>
           </a:p>
         </p:txBody>
@@ -5710,7 +5710,7 @@
                 </a:solidFill>
                 <a:latin typeface="Microsoft YaHei"/>
               </a:rPr>
-              <a:t>红色：累计&gt;1000元、挂失、理财申购等确认＋演示MFA</a:t>
+              <a:t>红色：单笔&gt;5000元或日累计&gt;1000元、挂失、理财申购等确认＋演示MFA</a:t>
             </a:r>
           </a:p>
           <a:p>
@@ -5765,7 +5765,7 @@
                 </a:solidFill>
                 <a:latin typeface="Microsoft YaHei"/>
               </a:rPr>
-              <a:t>0xChainAegis  ·  候选材料，人工验收另列  |  04 / 12</a:t>
+              <a:t>0xChainAegis  ·  2026 深圳国际金融科技大赛  |  04 / 12</a:t>
             </a:r>
           </a:p>
         </p:txBody>
@@ -5830,7 +5830,7 @@
                 </a:solidFill>
                 <a:latin typeface="Microsoft YaHei"/>
               </a:rPr>
-              <a:t>AEGISBANK  /  2026-10-31  /  模拟银行原型</a:t>
+              <a:t>AEGISBANK  /  银行 AI 智能体  /  模拟银行原型</a:t>
             </a:r>
           </a:p>
         </p:txBody>
@@ -5995,7 +5995,7 @@
                 </a:solidFill>
                 <a:latin typeface="Microsoft YaHei"/>
               </a:rPr>
-              <a:t>0xChainAegis  ·  候选材料，人工验收另列  |  05 / 12</a:t>
+              <a:t>0xChainAegis  ·  2026 深圳国际金融科技大赛  |  05 / 12</a:t>
             </a:r>
           </a:p>
         </p:txBody>
@@ -6060,7 +6060,7 @@
                 </a:solidFill>
                 <a:latin typeface="Microsoft YaHei"/>
               </a:rPr>
-              <a:t>AEGISBANK  /  2026-10-31  /  模拟银行原型</a:t>
+              <a:t>AEGISBANK  /  银行 AI 智能体  /  模拟银行原型</a:t>
             </a:r>
           </a:p>
         </p:txBody>
@@ -6225,7 +6225,7 @@
                 </a:solidFill>
                 <a:latin typeface="Microsoft YaHei"/>
               </a:rPr>
-              <a:t>0xChainAegis  ·  候选材料，人工验收另列  |  06 / 12</a:t>
+              <a:t>0xChainAegis  ·  2026 深圳国际金融科技大赛  |  06 / 12</a:t>
             </a:r>
           </a:p>
         </p:txBody>
@@ -6290,7 +6290,7 @@
                 </a:solidFill>
                 <a:latin typeface="Microsoft YaHei"/>
               </a:rPr>
-              <a:t>AEGISBANK  /  2026-10-31  /  模拟银行原型</a:t>
+              <a:t>AEGISBANK  /  银行 AI 智能体  /  模拟银行原型</a:t>
             </a:r>
           </a:p>
         </p:txBody>
@@ -6455,7 +6455,7 @@
                 </a:solidFill>
                 <a:latin typeface="Microsoft YaHei"/>
               </a:rPr>
-              <a:t>0xChainAegis  ·  候选材料，人工验收另列  |  07 / 12</a:t>
+              <a:t>0xChainAegis  ·  2026 深圳国际金融科技大赛  |  07 / 12</a:t>
             </a:r>
           </a:p>
         </p:txBody>
@@ -6520,7 +6520,7 @@
                 </a:solidFill>
                 <a:latin typeface="Microsoft YaHei"/>
               </a:rPr>
-              <a:t>AEGISBANK  /  2026-10-31  /  模拟银行原型</a:t>
+              <a:t>AEGISBANK  /  银行 AI 智能体  /  模拟银行原型</a:t>
             </a:r>
           </a:p>
         </p:txBody>
@@ -6685,7 +6685,7 @@
                 </a:solidFill>
                 <a:latin typeface="Microsoft YaHei"/>
               </a:rPr>
-              <a:t>0xChainAegis  ·  候选材料，人工验收另列  |  08 / 12</a:t>
+              <a:t>0xChainAegis  ·  2026 深圳国际金融科技大赛  |  08 / 12</a:t>
             </a:r>
           </a:p>
         </p:txBody>
@@ -6750,7 +6750,7 @@
                 </a:solidFill>
                 <a:latin typeface="Microsoft YaHei"/>
               </a:rPr>
-              <a:t>AEGISBANK  /  2026-10-31  /  模拟银行原型</a:t>
+              <a:t>AEGISBANK  /  银行 AI 智能体  /  模拟银行原型</a:t>
             </a:r>
           </a:p>
         </p:txBody>
@@ -6789,7 +6789,7 @@
                 </a:solidFill>
                 <a:latin typeface="Microsoft YaHei"/>
               </a:rPr>
-              <a:t>离线评测：公开失败与适用边界</a:t>
+              <a:t>有界语义：能力范围与评测边界</a:t>
             </a:r>
           </a:p>
         </p:txBody>
@@ -6828,7 +6828,7 @@
                 </a:solidFill>
                 <a:latin typeface="Microsoft YaHei"/>
               </a:rPr>
-              <a:t>复用冻结语料与表达家族隔离，保留全部失败样本</a:t>
+              <a:t>语义层规范化金额、联系人、账户、卡片与日期</a:t>
             </a:r>
           </a:p>
           <a:p>
@@ -6844,7 +6844,7 @@
                 </a:solidFill>
                 <a:latin typeface="Microsoft YaHei"/>
               </a:rPr>
-              <a:t>开发集与已查看的保留集分别报告，不混为未见成绩</a:t>
+              <a:t>歧义、条件或组合超出范围时转为澄清</a:t>
             </a:r>
           </a:p>
           <a:p>
@@ -6860,7 +6860,7 @@
                 </a:solidFill>
                 <a:latin typeface="Microsoft YaHei"/>
               </a:rPr>
-              <a:t>安全反例检查业务库变化；规则与模型成绩分开</a:t>
+              <a:t>默认离线规则 Planner；模型只生成候选计划</a:t>
             </a:r>
           </a:p>
           <a:p>
@@ -6876,7 +6876,7 @@
                 </a:solidFill>
                 <a:latin typeface="Microsoft YaHei"/>
               </a:rPr>
-              <a:t>人工金标复核pending；真实模型按用户决定暂缓</a:t>
+              <a:t>离线评测不等同真实模型准确率</a:t>
             </a:r>
           </a:p>
         </p:txBody>
@@ -6915,7 +6915,7 @@
                 </a:solidFill>
                 <a:latin typeface="Microsoft YaHei"/>
               </a:rPr>
-              <a:t>0xChainAegis  ·  候选材料，人工验收另列  |  09 / 12</a:t>
+              <a:t>0xChainAegis  ·  2026 深圳国际金融科技大赛  |  09 / 12</a:t>
             </a:r>
           </a:p>
         </p:txBody>
